--- a/laporan_tesis/Presentasi-Tesis-Mustari.pptx
+++ b/laporan_tesis/Presentasi-Tesis-Mustari.pptx
@@ -26,6 +26,7 @@
     <p:sldId id="271" r:id="rId17"/>
     <p:sldId id="272" r:id="rId18"/>
     <p:sldId id="273" r:id="rId19"/>
+    <p:sldId id="274" r:id="rId25"/>
   </p:sldIdLst>
   <p:sldSz cx="12192000" cy="6858000"/>
   <p:notesSz cx="6858000" cy="12192000"/>
@@ -11612,6 +11613,788 @@
 </p:sld>
 </file>
 
+<file path=ppt/slides/slide19.xml><?xml version="1.0" encoding="utf-8"?>
+<p:sld xmlns:a="http://schemas.openxmlformats.org/drawingml/2006/main" xmlns:p="http://schemas.openxmlformats.org/presentationml/2006/main" xmlns:r="http://schemas.openxmlformats.org/officeDocument/2006/relationships">
+  <p:cSld>
+    <p:bg>
+      <p:bgPr>
+        <a:solidFill>
+          <a:srgbClr val="0F3B4C"/>
+        </a:solidFill>
+        <a:effectLst/>
+      </p:bgPr>
+    </p:bg>
+    <p:spTree>
+      <p:nvGrpSpPr>
+        <p:cNvPr id="1" name=""/>
+        <p:cNvGrpSpPr/>
+        <p:nvPr/>
+      </p:nvGrpSpPr>
+      <p:grpSpPr/>
+      <p:sp>
+        <p:nvSpPr>
+          <p:cNvPr id="2" name="Oval 1"/>
+          <p:cNvSpPr/>
+          <p:nvPr/>
+        </p:nvSpPr>
+        <p:spPr>
+          <a:xfrm>
+            <a:off x="9692640" y="-1554480"/>
+            <a:ext cx="4206240" cy="4206240"/>
+          </a:xfrm>
+          <a:prstGeom prst="ellipse">
+            <a:avLst/>
+          </a:prstGeom>
+          <a:solidFill>
+            <a:srgbClr val="065A82"/>
+          </a:solidFill>
+          <a:ln>
+            <a:noFill/>
+          </a:ln>
+          <a:effectLst/>
+        </p:spPr>
+        <p:style>
+          <a:lnRef idx="1">
+            <a:schemeClr val="accent1"/>
+          </a:lnRef>
+          <a:fillRef idx="3">
+            <a:schemeClr val="accent1"/>
+          </a:fillRef>
+          <a:effectRef idx="2">
+            <a:schemeClr val="accent1"/>
+          </a:effectRef>
+          <a:fontRef idx="minor">
+            <a:schemeClr val="lt1"/>
+          </a:fontRef>
+        </p:style>
+        <p:txBody>
+          <a:bodyPr rtlCol="0" anchor="ctr"/>
+          <a:lstStyle/>
+          <a:p>
+            <a:pPr algn="ctr"/>
+          </a:p>
+        </p:txBody>
+      </p:sp>
+      <p:sp>
+        <p:nvSpPr>
+          <p:cNvPr id="3" name="Oval 2"/>
+          <p:cNvSpPr/>
+          <p:nvPr/>
+        </p:nvSpPr>
+        <p:spPr>
+          <a:xfrm>
+            <a:off x="-1280160" y="4480560"/>
+            <a:ext cx="3291840" cy="3291840"/>
+          </a:xfrm>
+          <a:prstGeom prst="ellipse">
+            <a:avLst/>
+          </a:prstGeom>
+          <a:solidFill>
+            <a:srgbClr val="1C7293"/>
+          </a:solidFill>
+          <a:ln>
+            <a:noFill/>
+          </a:ln>
+          <a:effectLst/>
+        </p:spPr>
+        <p:style>
+          <a:lnRef idx="1">
+            <a:schemeClr val="accent1"/>
+          </a:lnRef>
+          <a:fillRef idx="3">
+            <a:schemeClr val="accent1"/>
+          </a:fillRef>
+          <a:effectRef idx="2">
+            <a:schemeClr val="accent1"/>
+          </a:effectRef>
+          <a:fontRef idx="minor">
+            <a:schemeClr val="lt1"/>
+          </a:fontRef>
+        </p:style>
+        <p:txBody>
+          <a:bodyPr rtlCol="0" anchor="ctr"/>
+          <a:lstStyle/>
+          <a:p>
+            <a:pPr algn="ctr"/>
+          </a:p>
+        </p:txBody>
+      </p:sp>
+      <p:sp>
+        <p:nvSpPr>
+          <p:cNvPr id="4" name="Oval 3"/>
+          <p:cNvSpPr/>
+          <p:nvPr/>
+        </p:nvSpPr>
+        <p:spPr>
+          <a:xfrm>
+            <a:off x="640080" y="640080"/>
+            <a:ext cx="566928" cy="566928"/>
+          </a:xfrm>
+          <a:prstGeom prst="ellipse">
+            <a:avLst/>
+          </a:prstGeom>
+          <a:solidFill>
+            <a:srgbClr val="02C39A"/>
+          </a:solidFill>
+          <a:ln>
+            <a:noFill/>
+          </a:ln>
+          <a:effectLst/>
+        </p:spPr>
+        <p:style>
+          <a:lnRef idx="1">
+            <a:schemeClr val="accent1"/>
+          </a:lnRef>
+          <a:fillRef idx="3">
+            <a:schemeClr val="accent1"/>
+          </a:fillRef>
+          <a:effectRef idx="2">
+            <a:schemeClr val="accent1"/>
+          </a:effectRef>
+          <a:fontRef idx="minor">
+            <a:schemeClr val="lt1"/>
+          </a:fontRef>
+        </p:style>
+        <p:txBody>
+          <a:bodyPr rtlCol="0" anchor="ctr"/>
+          <a:lstStyle/>
+          <a:p>
+            <a:pPr algn="ctr"/>
+          </a:p>
+        </p:txBody>
+      </p:sp>
+      <p:sp>
+        <p:nvSpPr>
+          <p:cNvPr id="5" name="TextBox 4"/>
+          <p:cNvSpPr txBox="1"/>
+          <p:nvPr/>
+        </p:nvSpPr>
+        <p:spPr>
+          <a:xfrm>
+            <a:off x="1371600" y="594360"/>
+            <a:ext cx="7315200" cy="548640"/>
+          </a:xfrm>
+          <a:prstGeom prst="rect">
+            <a:avLst/>
+          </a:prstGeom>
+          <a:noFill/>
+        </p:spPr>
+        <p:txBody>
+          <a:bodyPr wrap="square" anchor="ctr" lIns="0" rIns="0" tIns="0" bIns="0">
+            <a:spAutoFit/>
+          </a:bodyPr>
+          <a:lstStyle/>
+          <a:p>
+            <a:pPr algn="l"/>
+            <a:r>
+              <a:rPr sz="1200" b="1">
+                <a:solidFill>
+                  <a:srgbClr val="02C39A"/>
+                </a:solidFill>
+                <a:latin typeface="Calibri"/>
+              </a:rPr>
+              <a:t>LAMPIRAN · SOURCE CODE &amp; DATA</a:t>
+            </a:r>
+          </a:p>
+        </p:txBody>
+      </p:sp>
+      <p:sp>
+        <p:nvSpPr>
+          <p:cNvPr id="6" name="TextBox 5"/>
+          <p:cNvSpPr txBox="1"/>
+          <p:nvPr/>
+        </p:nvSpPr>
+        <p:spPr>
+          <a:xfrm>
+            <a:off x="640080" y="1143000"/>
+            <a:ext cx="10515600" cy="640080"/>
+          </a:xfrm>
+          <a:prstGeom prst="rect">
+            <a:avLst/>
+          </a:prstGeom>
+          <a:noFill/>
+        </p:spPr>
+        <p:txBody>
+          <a:bodyPr wrap="square" anchor="ctr" lIns="0" rIns="0" tIns="0" bIns="0">
+            <a:spAutoFit/>
+          </a:bodyPr>
+          <a:lstStyle/>
+          <a:p>
+            <a:pPr algn="l"/>
+            <a:r>
+              <a:rPr sz="2600" b="1">
+                <a:solidFill>
+                  <a:srgbClr val="FFFFFF"/>
+                </a:solidFill>
+                <a:latin typeface="Cambria"/>
+              </a:rPr>
+              <a:t>Kode Program, Data Pengukuran &amp; Slide</a:t>
+            </a:r>
+          </a:p>
+        </p:txBody>
+      </p:sp>
+      <p:sp>
+        <p:nvSpPr>
+          <p:cNvPr id="7" name="Rounded Rectangle 6"/>
+          <p:cNvSpPr/>
+          <p:nvPr/>
+        </p:nvSpPr>
+        <p:spPr>
+          <a:xfrm>
+            <a:off x="640080" y="1965960"/>
+            <a:ext cx="10908720" cy="1371600"/>
+          </a:xfrm>
+          <a:prstGeom prst="roundRect">
+            <a:avLst>
+              <a:gd name="adj" fmla="val 4375"/>
+            </a:avLst>
+          </a:prstGeom>
+          <a:solidFill>
+            <a:srgbClr val="065A82"/>
+          </a:solidFill>
+          <a:ln>
+            <a:noFill/>
+          </a:ln>
+          <a:effectLst/>
+        </p:spPr>
+        <p:style>
+          <a:lnRef idx="1">
+            <a:schemeClr val="accent1"/>
+          </a:lnRef>
+          <a:fillRef idx="3">
+            <a:schemeClr val="accent1"/>
+          </a:fillRef>
+          <a:effectRef idx="2">
+            <a:schemeClr val="accent1"/>
+          </a:effectRef>
+          <a:fontRef idx="minor">
+            <a:schemeClr val="lt1"/>
+          </a:fontRef>
+        </p:style>
+        <p:txBody>
+          <a:bodyPr rtlCol="0" anchor="ctr"/>
+          <a:lstStyle/>
+          <a:p>
+            <a:pPr algn="ctr"/>
+          </a:p>
+        </p:txBody>
+      </p:sp>
+      <p:sp>
+        <p:nvSpPr>
+          <p:cNvPr id="8" name="TextBox 7"/>
+          <p:cNvSpPr txBox="1"/>
+          <p:nvPr/>
+        </p:nvSpPr>
+        <p:spPr>
+          <a:xfrm>
+            <a:off x="896112" y="2130552"/>
+            <a:ext cx="10424160" cy="320040"/>
+          </a:xfrm>
+          <a:prstGeom prst="rect">
+            <a:avLst/>
+          </a:prstGeom>
+          <a:noFill/>
+        </p:spPr>
+        <p:txBody>
+          <a:bodyPr wrap="square" anchor="t" lIns="0" rIns="0" tIns="0" bIns="0">
+            <a:spAutoFit/>
+          </a:bodyPr>
+          <a:lstStyle/>
+          <a:p>
+            <a:pPr algn="l"/>
+            <a:r>
+              <a:rPr sz="1200" b="1">
+                <a:solidFill>
+                  <a:srgbClr val="02C39A"/>
+                </a:solidFill>
+                <a:latin typeface="Calibri"/>
+              </a:rPr>
+              <a:t>TAUTAN GOOGLE DRIVE</a:t>
+            </a:r>
+          </a:p>
+        </p:txBody>
+      </p:sp>
+      <p:sp>
+        <p:nvSpPr>
+          <p:cNvPr id="9" name="TextBox 8"/>
+          <p:cNvSpPr txBox="1"/>
+          <p:nvPr/>
+        </p:nvSpPr>
+        <p:spPr>
+          <a:xfrm>
+            <a:off x="896112" y="2496312"/>
+            <a:ext cx="10424160" cy="640080"/>
+          </a:xfrm>
+          <a:prstGeom prst="rect">
+            <a:avLst/>
+          </a:prstGeom>
+          <a:noFill/>
+        </p:spPr>
+        <p:txBody>
+          <a:bodyPr wrap="square" anchor="t" lIns="0" rIns="0" tIns="0" bIns="0">
+            <a:spAutoFit/>
+          </a:bodyPr>
+          <a:lstStyle/>
+          <a:p>
+            <a:pPr algn="l"/>
+            <a:r>
+              <a:rPr sz="1800" b="1">
+                <a:solidFill>
+                  <a:srgbClr val="FFFFFF"/>
+                </a:solidFill>
+                <a:latin typeface="Calibri"/>
+              </a:rPr>
+              <a:t>[ISI LINK GOOGLE DRIVE DI SINI]</a:t>
+            </a:r>
+          </a:p>
+        </p:txBody>
+      </p:sp>
+      <p:sp>
+        <p:nvSpPr>
+          <p:cNvPr id="10" name="TextBox 9"/>
+          <p:cNvSpPr txBox="1"/>
+          <p:nvPr/>
+        </p:nvSpPr>
+        <p:spPr>
+          <a:xfrm>
+            <a:off x="896112" y="2971800"/>
+            <a:ext cx="10424160" cy="274320"/>
+          </a:xfrm>
+          <a:prstGeom prst="rect">
+            <a:avLst/>
+          </a:prstGeom>
+          <a:noFill/>
+        </p:spPr>
+        <p:txBody>
+          <a:bodyPr wrap="square" anchor="t" lIns="0" rIns="0" tIns="0" bIns="0">
+            <a:spAutoFit/>
+          </a:bodyPr>
+          <a:lstStyle/>
+          <a:p>
+            <a:pPr algn="l"/>
+            <a:r>
+              <a:rPr sz="1100" b="0">
+                <a:solidFill>
+                  <a:srgbClr val="D5E3EA"/>
+                </a:solidFill>
+                <a:latin typeface="Calibri"/>
+              </a:rPr>
+              <a:t>Folder berisi arsip ZIP source code + data pengukuran dan berkas slide presentasi.</a:t>
+            </a:r>
+          </a:p>
+        </p:txBody>
+      </p:sp>
+      <p:sp>
+        <p:nvSpPr>
+          <p:cNvPr id="11" name="Rounded Rectangle 10"/>
+          <p:cNvSpPr/>
+          <p:nvPr/>
+        </p:nvSpPr>
+        <p:spPr>
+          <a:xfrm>
+            <a:off x="640080" y="3611880"/>
+            <a:ext cx="5175504" cy="2377440"/>
+          </a:xfrm>
+          <a:prstGeom prst="roundRect">
+            <a:avLst>
+              <a:gd name="adj" fmla="val 4375"/>
+            </a:avLst>
+          </a:prstGeom>
+          <a:solidFill>
+            <a:srgbClr val="065A82"/>
+          </a:solidFill>
+          <a:ln>
+            <a:noFill/>
+          </a:ln>
+          <a:effectLst/>
+        </p:spPr>
+        <p:style>
+          <a:lnRef idx="1">
+            <a:schemeClr val="accent1"/>
+          </a:lnRef>
+          <a:fillRef idx="3">
+            <a:schemeClr val="accent1"/>
+          </a:fillRef>
+          <a:effectRef idx="2">
+            <a:schemeClr val="accent1"/>
+          </a:effectRef>
+          <a:fontRef idx="minor">
+            <a:schemeClr val="lt1"/>
+          </a:fontRef>
+        </p:style>
+        <p:txBody>
+          <a:bodyPr rtlCol="0" anchor="ctr"/>
+          <a:lstStyle/>
+          <a:p>
+            <a:pPr algn="ctr"/>
+          </a:p>
+        </p:txBody>
+      </p:sp>
+      <p:sp>
+        <p:nvSpPr>
+          <p:cNvPr id="12" name="TextBox 11"/>
+          <p:cNvSpPr txBox="1"/>
+          <p:nvPr/>
+        </p:nvSpPr>
+        <p:spPr>
+          <a:xfrm>
+            <a:off x="896112" y="3776472"/>
+            <a:ext cx="4663440" cy="365760"/>
+          </a:xfrm>
+          <a:prstGeom prst="rect">
+            <a:avLst/>
+          </a:prstGeom>
+          <a:noFill/>
+        </p:spPr>
+        <p:txBody>
+          <a:bodyPr wrap="square" anchor="t" lIns="0" rIns="0" tIns="0" bIns="0">
+            <a:spAutoFit/>
+          </a:bodyPr>
+          <a:lstStyle/>
+          <a:p>
+            <a:pPr algn="l"/>
+            <a:r>
+              <a:rPr sz="1400" b="1">
+                <a:solidFill>
+                  <a:srgbClr val="FFFFFF"/>
+                </a:solidFill>
+                <a:latin typeface="Calibri"/>
+              </a:rPr>
+              <a:t>1.  mustari-pnup-main.zip (arsip repositori GitHub)</a:t>
+            </a:r>
+          </a:p>
+        </p:txBody>
+      </p:sp>
+      <p:sp>
+        <p:nvSpPr>
+          <p:cNvPr id="13" name="TextBox 12"/>
+          <p:cNvSpPr txBox="1"/>
+          <p:nvPr/>
+        </p:nvSpPr>
+        <p:spPr>
+          <a:xfrm>
+            <a:off x="896112" y="4187952"/>
+            <a:ext cx="4663440" cy="1700000"/>
+          </a:xfrm>
+          <a:prstGeom prst="rect">
+            <a:avLst/>
+          </a:prstGeom>
+          <a:noFill/>
+        </p:spPr>
+        <p:txBody>
+          <a:bodyPr wrap="square" anchor="t" lIns="0" rIns="0" tIns="0" bIns="0">
+            <a:spAutoFit/>
+          </a:bodyPr>
+          <a:lstStyle/>
+          <a:p>
+            <a:pPr algn="l">
+              <a:spcAft>
+                <a:spcPts val="600"/>
+              </a:spcAft>
+            </a:pPr>
+            <a:r>
+              <a:rPr sz="1100" b="0">
+                <a:solidFill>
+                  <a:srgbClr val="D5E3EA"/>
+                </a:solidFill>
+                <a:latin typeface="Calibri"/>
+              </a:rPr>
+              <a:t>•  src/ — kode sumber aplikasi SIMTA (Vue 3, Pinia, Chart.js, service layer)</a:t>
+            </a:r>
+          </a:p>
+          <a:p>
+            <a:pPr algn="l">
+              <a:spcAft>
+                <a:spcPts val="600"/>
+              </a:spcAft>
+            </a:pPr>
+            <a:r>
+              <a:rPr sz="1100" b="0">
+                <a:solidFill>
+                  <a:srgbClr val="D5E3EA"/>
+                </a:solidFill>
+                <a:latin typeface="Calibri"/>
+              </a:rPr>
+              <a:t>•  vite.config.baseline.js &amp; vite.config.optimized.js — konfigurasi manualChunks</a:t>
+            </a:r>
+          </a:p>
+          <a:p>
+            <a:pPr algn="l">
+              <a:spcAft>
+                <a:spcPts val="600"/>
+              </a:spcAft>
+            </a:pPr>
+            <a:r>
+              <a:rPr sz="1100" b="0">
+                <a:solidFill>
+                  <a:srgbClr val="D5E3EA"/>
+                </a:solidFill>
+                <a:latin typeface="Calibri"/>
+              </a:rPr>
+              <a:t>•  dist-* — hasil build kedua versi sebagai bukti ukuran bundle</a:t>
+            </a:r>
+          </a:p>
+          <a:p>
+            <a:pPr algn="l">
+              <a:spcAft>
+                <a:spcPts val="600"/>
+              </a:spcAft>
+            </a:pPr>
+            <a:r>
+              <a:rPr sz="1100" b="0">
+                <a:solidFill>
+                  <a:srgbClr val="D5E3EA"/>
+                </a:solidFill>
+                <a:latin typeface="Calibri"/>
+              </a:rPr>
+              <a:t>•  ukur_multirun.cjs, ukur_lighthouse.cjs — skrip pengukuran Puppeteer</a:t>
+            </a:r>
+          </a:p>
+          <a:p>
+            <a:pPr algn="l">
+              <a:spcAft>
+                <a:spcPts val="600"/>
+              </a:spcAft>
+            </a:pPr>
+            <a:r>
+              <a:rPr sz="1100" b="0">
+                <a:solidFill>
+                  <a:srgbClr val="D5E3EA"/>
+                </a:solidFill>
+                <a:latin typeface="Calibri"/>
+              </a:rPr>
+              <a:t>•  analisis_statistik.py, create_final_charts.py — skrip statistik &amp; grafik</a:t>
+            </a:r>
+          </a:p>
+        </p:txBody>
+      </p:sp>
+      <p:sp>
+        <p:nvSpPr>
+          <p:cNvPr id="14" name="Rounded Rectangle 13"/>
+          <p:cNvSpPr/>
+          <p:nvPr/>
+        </p:nvSpPr>
+        <p:spPr>
+          <a:xfrm>
+            <a:off x="6373368" y="3611880"/>
+            <a:ext cx="5175504" cy="2377440"/>
+          </a:xfrm>
+          <a:prstGeom prst="roundRect">
+            <a:avLst>
+              <a:gd name="adj" fmla="val 4375"/>
+            </a:avLst>
+          </a:prstGeom>
+          <a:solidFill>
+            <a:srgbClr val="065A82"/>
+          </a:solidFill>
+          <a:ln>
+            <a:noFill/>
+          </a:ln>
+          <a:effectLst/>
+        </p:spPr>
+        <p:style>
+          <a:lnRef idx="1">
+            <a:schemeClr val="accent1"/>
+          </a:lnRef>
+          <a:fillRef idx="3">
+            <a:schemeClr val="accent1"/>
+          </a:fillRef>
+          <a:effectRef idx="2">
+            <a:schemeClr val="accent1"/>
+          </a:effectRef>
+          <a:fontRef idx="minor">
+            <a:schemeClr val="lt1"/>
+          </a:fontRef>
+        </p:style>
+        <p:txBody>
+          <a:bodyPr rtlCol="0" anchor="ctr"/>
+          <a:lstStyle/>
+          <a:p>
+            <a:pPr algn="ctr"/>
+          </a:p>
+        </p:txBody>
+      </p:sp>
+      <p:sp>
+        <p:nvSpPr>
+          <p:cNvPr id="15" name="TextBox 14"/>
+          <p:cNvSpPr txBox="1"/>
+          <p:nvPr/>
+        </p:nvSpPr>
+        <p:spPr>
+          <a:xfrm>
+            <a:off x="6629400" y="3776472"/>
+            <a:ext cx="4663440" cy="365760"/>
+          </a:xfrm>
+          <a:prstGeom prst="rect">
+            <a:avLst/>
+          </a:prstGeom>
+          <a:noFill/>
+        </p:spPr>
+        <p:txBody>
+          <a:bodyPr wrap="square" anchor="t" lIns="0" rIns="0" tIns="0" bIns="0">
+            <a:spAutoFit/>
+          </a:bodyPr>
+          <a:lstStyle/>
+          <a:p>
+            <a:pPr algn="l"/>
+            <a:r>
+              <a:rPr sz="1400" b="1">
+                <a:solidFill>
+                  <a:srgbClr val="FFFFFF"/>
+                </a:solidFill>
+                <a:latin typeface="Calibri"/>
+              </a:rPr>
+              <a:t>2.  data_pengukuran/ &amp; Presentasi-Tesis-Mustari.pptx</a:t>
+            </a:r>
+          </a:p>
+        </p:txBody>
+      </p:sp>
+      <p:sp>
+        <p:nvSpPr>
+          <p:cNvPr id="16" name="TextBox 15"/>
+          <p:cNvSpPr txBox="1"/>
+          <p:nvPr/>
+        </p:nvSpPr>
+        <p:spPr>
+          <a:xfrm>
+            <a:off x="6629400" y="4187952"/>
+            <a:ext cx="4663440" cy="1700000"/>
+          </a:xfrm>
+          <a:prstGeom prst="rect">
+            <a:avLst/>
+          </a:prstGeom>
+          <a:noFill/>
+        </p:spPr>
+        <p:txBody>
+          <a:bodyPr wrap="square" anchor="t" lIns="0" rIns="0" tIns="0" bIns="0">
+            <a:spAutoFit/>
+          </a:bodyPr>
+          <a:lstStyle/>
+          <a:p>
+            <a:pPr algn="l">
+              <a:spcAft>
+                <a:spcPts val="600"/>
+              </a:spcAft>
+            </a:pPr>
+            <a:r>
+              <a:rPr sz="1100" b="0">
+                <a:solidFill>
+                  <a:srgbClr val="D5E3EA"/>
+                </a:solidFill>
+                <a:latin typeface="Calibri"/>
+              </a:rPr>
+              <a:t>•  multirun_*.json — data 5 repetisi tiap skenario (Tabel 3.1–3.5)</a:t>
+            </a:r>
+          </a:p>
+          <a:p>
+            <a:pPr algn="l">
+              <a:spcAft>
+                <a:spcPts val="600"/>
+              </a:spcAft>
+            </a:pPr>
+            <a:r>
+              <a:rPr sz="1100" b="0">
+                <a:solidFill>
+                  <a:srgbClr val="D5E3EA"/>
+                </a:solidFill>
+                <a:latin typeface="Calibri"/>
+              </a:rPr>
+              <a:t>•  lighthouse_*.json — hasil audit Lighthouse (Tabel 3.6–3.7)</a:t>
+            </a:r>
+          </a:p>
+          <a:p>
+            <a:pPr algn="l">
+              <a:spcAft>
+                <a:spcPts val="600"/>
+              </a:spcAft>
+            </a:pPr>
+            <a:r>
+              <a:rPr sz="1100" b="0">
+                <a:solidFill>
+                  <a:srgbClr val="D5E3EA"/>
+                </a:solidFill>
+                <a:latin typeface="Calibri"/>
+              </a:rPr>
+              <a:t>•  summary_stats.json — rekapitulasi rata-rata &amp; standar deviasi</a:t>
+            </a:r>
+          </a:p>
+          <a:p>
+            <a:pPr algn="l">
+              <a:spcAft>
+                <a:spcPts val="600"/>
+              </a:spcAft>
+            </a:pPr>
+            <a:r>
+              <a:rPr sz="1100" b="0">
+                <a:solidFill>
+                  <a:srgbClr val="D5E3EA"/>
+                </a:solidFill>
+                <a:latin typeface="Calibri"/>
+              </a:rPr>
+              <a:t>•  Presentasi-Tesis-Mustari.pptx — berkas slide ujian tesis</a:t>
+            </a:r>
+          </a:p>
+          <a:p>
+            <a:pPr algn="l">
+              <a:spcAft>
+                <a:spcPts val="600"/>
+              </a:spcAft>
+            </a:pPr>
+            <a:r>
+              <a:rPr sz="1100" b="1">
+                <a:solidFill>
+                  <a:srgbClr val="02C39A"/>
+                </a:solidFill>
+                <a:latin typeface="Calibri"/>
+              </a:rPr>
+              <a:t>Total 125 berkas · seluruh angka pada BAB III dapat direproduksi.</a:t>
+            </a:r>
+          </a:p>
+        </p:txBody>
+      </p:sp>
+      <p:sp>
+        <p:nvSpPr>
+          <p:cNvPr id="17" name="TextBox 16"/>
+          <p:cNvSpPr txBox="1"/>
+          <p:nvPr/>
+        </p:nvSpPr>
+        <p:spPr>
+          <a:xfrm>
+            <a:off x="11231575" y="6400800"/>
+            <a:ext cx="548640" cy="274320"/>
+          </a:xfrm>
+          <a:prstGeom prst="rect">
+            <a:avLst/>
+          </a:prstGeom>
+          <a:noFill/>
+        </p:spPr>
+        <p:txBody>
+          <a:bodyPr wrap="square" anchor="t" lIns="0" rIns="0" tIns="0" bIns="0">
+            <a:spAutoFit/>
+          </a:bodyPr>
+          <a:lstStyle/>
+          <a:p>
+            <a:pPr algn="r"/>
+            <a:r>
+              <a:rPr sz="1100" b="0">
+                <a:solidFill>
+                  <a:srgbClr val="D5E3EA"/>
+                </a:solidFill>
+                <a:latin typeface="Calibri"/>
+              </a:rPr>
+              <a:t>19</a:t>
+            </a:r>
+          </a:p>
+        </p:txBody>
+      </p:sp>
+    </p:spTree>
+  </p:cSld>
+  <p:clrMapOvr>
+    <a:masterClrMapping/>
+  </p:clrMapOvr>
+</p:sld>
+</file>
+
 <file path=ppt/slides/slide2.xml><?xml version="1.0" encoding="utf-8"?>
 <p:sld xmlns:a="http://schemas.openxmlformats.org/drawingml/2006/main" xmlns:r="http://schemas.openxmlformats.org/officeDocument/2006/relationships" xmlns:p="http://schemas.openxmlformats.org/presentationml/2006/main">
   <p:cSld name="Slide 2">
@@ -18148,7 +18931,7 @@
                 <a:ea typeface="Calibri" pitchFamily="34" charset="-122"/>
                 <a:cs typeface="Calibri" pitchFamily="34" charset="-120"/>
               </a:rPr>
-              <a:t>Chart.js, Pinia, Supabase, Vue-Router bersamaan</a:t>
+              <a:t>Chart.js, Pinia, Vue-Router bersamaan</a:t>
             </a:r>
             <a:endParaRPr lang="en-US" sz="1150" dirty="0"/>
           </a:p>
@@ -18196,7 +18979,7 @@
                 <a:ea typeface="Calibri" pitchFamily="34" charset="-122"/>
                 <a:cs typeface="Calibri" pitchFamily="34" charset="-120"/>
               </a:rPr>
-              <a:t>Autentikasi pengguna berbasis Supabase</a:t>
+              <a:t>Alur autentikasi pengguna</a:t>
             </a:r>
             <a:endParaRPr lang="en-US" sz="1150" dirty="0"/>
           </a:p>
